--- a/deliverables/青岛抚顺路和哈尔滨路路口交通事故_伤情与伤残简报_20260817.pptx
+++ b/deliverables/青岛抚顺路和哈尔滨路路口交通事故_伤情与伤残简报_20260817.pptx
@@ -3301,7 +3301,7 @@
                 <a:latin typeface="Microsoft YaHei"/>
                 <a:ea typeface="Microsoft YaHei"/>
               </a:rPr>
-              <a:t>伤者：胡某 · 男 · 64岁</a:t>
+              <a:t>伤者：胡志远 · 男 · 64岁</a:t>
             </a:r>
           </a:p>
           <a:p>
@@ -3314,7 +3314,7 @@
                 <a:latin typeface="Microsoft YaHei"/>
                 <a:ea typeface="Microsoft YaHei"/>
               </a:rPr>
-              <a:t>结论：影像已定性，伤残尚未鉴定，现在不能报残级</a:t>
+              <a:t>结论：出院记录已定性开放伤，伤残尚未鉴定，现在不能报残级</a:t>
             </a:r>
           </a:p>
         </p:txBody>
@@ -4696,7 +4696,7 @@
                 <a:latin typeface="Microsoft YaHei"/>
                 <a:ea typeface="Microsoft YaHei"/>
               </a:rPr>
-              <a:t>只有 64 岁男性胡某。</a:t>
+              <a:t>只有 64 岁男性胡志远。</a:t>
             </a:r>
           </a:p>
           <a:p>
@@ -4722,7 +4722,7 @@
                 <a:latin typeface="Microsoft YaHei"/>
                 <a:ea typeface="Microsoft YaHei"/>
               </a:rPr>
-              <a:t>三份 CT 都是他的：</a:t>
+              <a:t>病历、腕带、出院记录同名。</a:t>
             </a:r>
           </a:p>
           <a:p>
@@ -4735,7 +4735,7 @@
                 <a:latin typeface="Microsoft YaHei"/>
                 <a:ea typeface="Microsoft YaHei"/>
               </a:rPr>
-              <a:t>右小腿、右足、术后右踝。</a:t>
+              <a:t>住院号 0001519455，33 床。</a:t>
             </a:r>
           </a:p>
           <a:p>
@@ -4936,7 +4936,7 @@
                 <a:latin typeface="Microsoft YaHei"/>
                 <a:ea typeface="Microsoft YaHei"/>
               </a:rPr>
-              <a:t>本次外伤（急诊 CT）：</a:t>
+              <a:t>出院诊断（比 CT 更重）：</a:t>
             </a:r>
           </a:p>
           <a:p>
@@ -4949,7 +4949,7 @@
                 <a:latin typeface="Microsoft YaHei"/>
                 <a:ea typeface="Microsoft YaHei"/>
               </a:rPr>
-              <a:t>• 右胫骨远端骨折，移位</a:t>
+              <a:t>• 右开放性踝关节骨折</a:t>
             </a:r>
           </a:p>
           <a:p>
@@ -4962,7 +4962,7 @@
                 <a:latin typeface="Microsoft YaHei"/>
                 <a:ea typeface="Microsoft YaHei"/>
               </a:rPr>
-              <a:t>• 右腓骨近端骨折，移位</a:t>
+              <a:t>• 右开放性踝关节脱位</a:t>
             </a:r>
           </a:p>
           <a:p>
@@ -4975,7 +4975,7 @@
                 <a:latin typeface="Microsoft YaHei"/>
                 <a:ea typeface="Microsoft YaHei"/>
               </a:rPr>
-              <a:t>• 右踝关节半脱位</a:t>
+              <a:t>• 韧带断裂、皮肤坏死</a:t>
             </a:r>
           </a:p>
           <a:p>
@@ -4988,7 +4988,7 @@
                 <a:latin typeface="Microsoft YaHei"/>
                 <a:ea typeface="Microsoft YaHei"/>
               </a:rPr>
-              <a:t>• 距骨内缘、外踝撕脱骨折</a:t>
+              <a:t>• 胫骨远端、腓骨近端骨折</a:t>
             </a:r>
           </a:p>
           <a:p>
@@ -5014,7 +5014,7 @@
                 <a:latin typeface="Microsoft YaHei"/>
                 <a:ea typeface="Microsoft YaHei"/>
               </a:rPr>
-              <a:t>8月15日已做内外固定，</a:t>
+              <a:t>8月14日 19:01 手术：</a:t>
             </a:r>
           </a:p>
           <a:p>
@@ -5027,7 +5027,7 @@
                 <a:latin typeface="Microsoft YaHei"/>
                 <a:ea typeface="Microsoft YaHei"/>
               </a:rPr>
-              <a:t>复查固定在位、位线可。</a:t>
+              <a:t>内外固定+清创+VSD。</a:t>
             </a:r>
           </a:p>
         </p:txBody>
@@ -6953,7 +6953,7 @@
                 <a:latin typeface="Microsoft YaHei"/>
                 <a:ea typeface="Microsoft YaHei"/>
               </a:rPr>
-              <a:t>术后 CT：内外固定在位。以手术记录为准。</a:t>
+              <a:t>出院记录：外固定架及克氏针。根数以手术记录为准。</a:t>
             </a:r>
           </a:p>
         </p:txBody>
@@ -7107,7 +7107,7 @@
                 <a:latin typeface="Microsoft YaHei"/>
                 <a:ea typeface="Microsoft YaHei"/>
               </a:rPr>
-              <a:t>当天住院 CT 在手足外科，仍在齐鲁术后复查。</a:t>
+              <a:t>入院 8/14 14:14，出院 8/17 08:00。8/15 是术后 CT。</a:t>
             </a:r>
           </a:p>
         </p:txBody>
@@ -7407,7 +7407,7 @@
                 <a:latin typeface="Microsoft YaHei"/>
                 <a:ea typeface="Microsoft YaHei"/>
               </a:rPr>
-              <a:t>评谁：只评伤者胡某。别人没有残。</a:t>
+              <a:t>评谁：只评伤者胡志远。别人没有残。</a:t>
             </a:r>
           </a:p>
           <a:p>
@@ -7488,7 +7488,7 @@
                 <a:latin typeface="Microsoft YaHei"/>
                 <a:ea typeface="Microsoft YaHei"/>
               </a:rPr>
-              <a:t>评什么：右踝功能、行走能力。右足骨刺、退变删掉。</a:t>
+              <a:t>评什么：右踝开放伤后的功能、行走能力。骨刺、高血压、糖尿病删掉。</a:t>
             </a:r>
           </a:p>
           <a:p>
@@ -7542,7 +7542,7 @@
                 <a:latin typeface="Microsoft YaHei"/>
                 <a:ea typeface="Microsoft YaHei"/>
               </a:rPr>
-              <a:t>医学内部判断：损伤较重，日后若踝关节明显受限，具备启动评残的基础；级数看功能，不看急诊片子。</a:t>
+              <a:t>医学内部判断：开放性骨折脱位+韧带+VSD，损伤较重；级数看功能，不看急诊片子。</a:t>
             </a:r>
           </a:p>
         </p:txBody>

--- a/deliverables/青岛抚顺路和哈尔滨路路口交通事故_伤情与伤残简报_20260817.pptx
+++ b/deliverables/青岛抚顺路和哈尔滨路路口交通事故_伤情与伤残简报_20260817.pptx
@@ -10131,7 +10131,7 @@
                 <a:latin typeface="Microsoft YaHei"/>
                 <a:ea typeface="Microsoft YaHei"/>
               </a:rPr>
-              <a:t>2. 在同意任何责任比例或程序选择前，让处理交通事故的本地律师查看监控和车辆材料，尤其评估一般程序可能带来的车辆与驾驶资格风险。</a:t>
+              <a:t>2. 在同意任何责任比例或程序选择前，查看监控和车辆材料，尤其评估一般程序可能带来的车辆与驾驶资格风险。不到场见骑手，不先发函。</a:t>
             </a:r>
           </a:p>
           <a:p>
